--- a/instructor/modules/Module02-Hooks.pptx
+++ b/instructor/modules/Module02-Hooks.pptx
@@ -23552,7 +23552,7 @@
                 <a:ea typeface="Arial" pitchFamily="34" charset="-122"/>
                 <a:cs typeface="Arial" pitchFamily="34" charset="-120"/>
               </a:rPr>
-              <a:t>Open real-time-chat in the lab repo — class components, React 18, CRA</a:t>
+              <a:t>Open lab-files/lab-01/real-time-chat — class components, React 18, CRA</a:t>
             </a:r>
             <a:endParaRPr lang="en-US" sz="1250" dirty="0"/>
           </a:p>
@@ -23615,7 +23615,7 @@
                 <a:ea typeface="Arial" pitchFamily="34" charset="-122"/>
                 <a:cs typeface="Arial" pitchFamily="34" charset="-120"/>
               </a:rPr>
-              <a:t>Submit a working modernized chat app on a feature branch</a:t>
+              <a:t>End with a working modernized chat app and a short written review of the AI's mistakes</a:t>
             </a:r>
             <a:endParaRPr lang="en-US" sz="1250" dirty="0"/>
           </a:p>
